--- a/01 Review Day 1.pptx
+++ b/01 Review Day 1.pptx
@@ -5,10 +5,10 @@
     <p:sldMasterId id="2147483648" r:id="rId4"/>
   </p:sldMasterIdLst>
   <p:notesMasterIdLst>
-    <p:notesMasterId r:id="rId31"/>
+    <p:notesMasterId r:id="rId32"/>
   </p:notesMasterIdLst>
   <p:handoutMasterIdLst>
-    <p:handoutMasterId r:id="rId32"/>
+    <p:handoutMasterId r:id="rId33"/>
   </p:handoutMasterIdLst>
   <p:sldIdLst>
     <p:sldId id="299" r:id="rId5"/>
@@ -35,13 +35,14 @@
     <p:sldId id="1613" r:id="rId26"/>
     <p:sldId id="1615" r:id="rId27"/>
     <p:sldId id="1614" r:id="rId28"/>
-    <p:sldId id="1605" r:id="rId29"/>
-    <p:sldId id="790" r:id="rId30"/>
+    <p:sldId id="1616" r:id="rId29"/>
+    <p:sldId id="1605" r:id="rId30"/>
+    <p:sldId id="790" r:id="rId31"/>
   </p:sldIdLst>
   <p:sldSz cx="12192000" cy="6858000"/>
   <p:notesSz cx="9775825" cy="6645275"/>
   <p:custDataLst>
-    <p:tags r:id="rId33"/>
+    <p:tags r:id="rId34"/>
   </p:custDataLst>
   <p:defaultTextStyle>
     <a:defPPr>
@@ -268,7 +269,7 @@
           <a:p>
             <a:fld id="{86D088FE-3E68-47FE-8BA4-634CD34BABBC}" type="datetimeFigureOut">
               <a:rPr lang="en-GB" smtClean="0"/>
-              <a:t>14/09/2026</a:t>
+              <a:t>15/09/2026</a:t>
             </a:fld>
             <a:endParaRPr lang="en-GB"/>
           </a:p>
@@ -433,7 +434,7 @@
           <a:p>
             <a:fld id="{1D6B66C6-1E92-0F4E-A300-9D4ED1F0C23F}" type="datetimeFigureOut">
               <a:rPr lang="en-GB" smtClean="0"/>
-              <a:t>14/09/2026</a:t>
+              <a:t>15/09/2026</a:t>
             </a:fld>
             <a:endParaRPr lang="en-GB"/>
           </a:p>
@@ -2004,7 +2005,7 @@
             <a:fld id="{548901C6-1DA1-FB44-ABEE-06A0FEB7738E}" type="slidenum">
               <a:rPr lang="en-GB" smtClean="0"/>
               <a:pPr/>
-              <a:t>26</a:t>
+              <a:t>27</a:t>
             </a:fld>
             <a:endParaRPr lang="en-GB"/>
           </a:p>
@@ -24481,6 +24482,12 @@
           <a:prstGeom prst="rect">
             <a:avLst/>
           </a:prstGeom>
+          <a:solidFill>
+            <a:schemeClr val="accent5">
+              <a:lumMod val="20000"/>
+              <a:lumOff val="80000"/>
+            </a:schemeClr>
+          </a:solidFill>
           <a:ln>
             <a:solidFill>
               <a:schemeClr val="bg1">
@@ -25213,7 +25220,10 @@
             <a:avLst/>
           </a:prstGeom>
           <a:solidFill>
-            <a:schemeClr val="bg1"/>
+            <a:schemeClr val="accent5">
+              <a:lumMod val="20000"/>
+              <a:lumOff val="80000"/>
+            </a:schemeClr>
           </a:solidFill>
           <a:ln w="19050">
             <a:noFill/>
@@ -27106,7 +27116,10 @@
             <a:avLst/>
           </a:prstGeom>
           <a:solidFill>
-            <a:schemeClr val="bg1"/>
+            <a:schemeClr val="accent5">
+              <a:lumMod val="20000"/>
+              <a:lumOff val="80000"/>
+            </a:schemeClr>
           </a:solidFill>
           <a:ln w="19050">
             <a:noFill/>
@@ -33170,6 +33183,12 @@
           <a:prstGeom prst="rect">
             <a:avLst/>
           </a:prstGeom>
+          <a:solidFill>
+            <a:schemeClr val="accent5">
+              <a:lumMod val="20000"/>
+              <a:lumOff val="80000"/>
+            </a:schemeClr>
+          </a:solidFill>
           <a:ln>
             <a:solidFill>
               <a:schemeClr val="bg1">
@@ -34163,6 +34182,12 @@
           <a:prstGeom prst="rect">
             <a:avLst/>
           </a:prstGeom>
+          <a:solidFill>
+            <a:schemeClr val="accent5">
+              <a:lumMod val="20000"/>
+              <a:lumOff val="80000"/>
+            </a:schemeClr>
+          </a:solidFill>
           <a:ln>
             <a:solidFill>
               <a:schemeClr val="bg1">
@@ -35096,6 +35121,12 @@
           <a:prstGeom prst="rect">
             <a:avLst/>
           </a:prstGeom>
+          <a:solidFill>
+            <a:schemeClr val="accent5">
+              <a:lumMod val="20000"/>
+              <a:lumOff val="80000"/>
+            </a:schemeClr>
+          </a:solidFill>
           <a:ln>
             <a:solidFill>
               <a:schemeClr val="bg1">
@@ -35896,6 +35927,660 @@
   <p:cSld>
     <p:spTree>
       <p:nvGrpSpPr>
+        <p:cNvPr id="1" name="">
+          <a:extLst>
+            <a:ext uri="{FF2B5EF4-FFF2-40B4-BE49-F238E27FC236}">
+              <a16:creationId xmlns:a16="http://schemas.microsoft.com/office/drawing/2014/main" id="{619CC23A-584F-0875-9D1F-9C83169A7DB0}"/>
+            </a:ext>
+          </a:extLst>
+        </p:cNvPr>
+        <p:cNvGrpSpPr/>
+        <p:nvPr/>
+      </p:nvGrpSpPr>
+      <p:grpSpPr>
+        <a:xfrm>
+          <a:off x="0" y="0"/>
+          <a:ext cx="0" cy="0"/>
+          <a:chOff x="0" y="0"/>
+          <a:chExt cx="0" cy="0"/>
+        </a:xfrm>
+      </p:grpSpPr>
+      <p:sp>
+        <p:nvSpPr>
+          <p:cNvPr id="2" name="Slide Number Placeholder 1">
+            <a:extLst>
+              <a:ext uri="{FF2B5EF4-FFF2-40B4-BE49-F238E27FC236}">
+                <a16:creationId xmlns:a16="http://schemas.microsoft.com/office/drawing/2014/main" id="{A6E77F3E-2FE9-6CA0-E551-1CF4F0D284C6}"/>
+              </a:ext>
+            </a:extLst>
+          </p:cNvPr>
+          <p:cNvSpPr>
+            <a:spLocks noGrp="1"/>
+          </p:cNvSpPr>
+          <p:nvPr>
+            <p:ph type="sldNum" sz="quarter" idx="4"/>
+          </p:nvPr>
+        </p:nvSpPr>
+        <p:spPr/>
+        <p:txBody>
+          <a:bodyPr/>
+          <a:lstStyle/>
+          <a:p>
+            <a:fld id="{EF892D59-8F09-EF4B-AD6D-DA609442F868}" type="slidenum">
+              <a:rPr lang="en-GB" smtClean="0"/>
+              <a:pPr/>
+              <a:t>25</a:t>
+            </a:fld>
+            <a:endParaRPr lang="en-GB" dirty="0"/>
+          </a:p>
+        </p:txBody>
+      </p:sp>
+      <p:sp>
+        <p:nvSpPr>
+          <p:cNvPr id="3" name="Title 2">
+            <a:extLst>
+              <a:ext uri="{FF2B5EF4-FFF2-40B4-BE49-F238E27FC236}">
+                <a16:creationId xmlns:a16="http://schemas.microsoft.com/office/drawing/2014/main" id="{4CDE2AC0-2BBE-E07E-1D1F-E2C021309531}"/>
+              </a:ext>
+            </a:extLst>
+          </p:cNvPr>
+          <p:cNvSpPr>
+            <a:spLocks noGrp="1"/>
+          </p:cNvSpPr>
+          <p:nvPr>
+            <p:ph type="title"/>
+          </p:nvPr>
+        </p:nvSpPr>
+        <p:spPr/>
+        <p:txBody>
+          <a:bodyPr/>
+          <a:lstStyle/>
+          <a:p>
+            <a:r>
+              <a:rPr lang="en-US" dirty="0"/>
+              <a:t>Returning an Array</a:t>
+            </a:r>
+            <a:endParaRPr lang="en-GB" dirty="0"/>
+          </a:p>
+        </p:txBody>
+      </p:sp>
+      <p:sp>
+        <p:nvSpPr>
+          <p:cNvPr id="5" name="TextBox 4">
+            <a:extLst>
+              <a:ext uri="{FF2B5EF4-FFF2-40B4-BE49-F238E27FC236}">
+                <a16:creationId xmlns:a16="http://schemas.microsoft.com/office/drawing/2014/main" id="{CF330FA8-D883-26FF-4EF0-5C06927C5B69}"/>
+              </a:ext>
+            </a:extLst>
+          </p:cNvPr>
+          <p:cNvSpPr txBox="1"/>
+          <p:nvPr/>
+        </p:nvSpPr>
+        <p:spPr>
+          <a:xfrm>
+            <a:off x="1126192" y="1615360"/>
+            <a:ext cx="9133914" cy="3370153"/>
+          </a:xfrm>
+          <a:prstGeom prst="rect">
+            <a:avLst/>
+          </a:prstGeom>
+          <a:solidFill>
+            <a:schemeClr val="accent5">
+              <a:lumMod val="20000"/>
+              <a:lumOff val="80000"/>
+            </a:schemeClr>
+          </a:solidFill>
+          <a:ln>
+            <a:solidFill>
+              <a:schemeClr val="bg1">
+                <a:lumMod val="95000"/>
+              </a:schemeClr>
+            </a:solidFill>
+          </a:ln>
+          <a:effectLst>
+            <a:outerShdw blurRad="50800" dist="38100" algn="l" rotWithShape="0">
+              <a:prstClr val="black">
+                <a:alpha val="40000"/>
+              </a:prstClr>
+            </a:outerShdw>
+          </a:effectLst>
+        </p:spPr>
+        <p:style>
+          <a:lnRef idx="2">
+            <a:schemeClr val="dk1"/>
+          </a:lnRef>
+          <a:fillRef idx="1">
+            <a:schemeClr val="lt1"/>
+          </a:fillRef>
+          <a:effectRef idx="0">
+            <a:schemeClr val="dk1"/>
+          </a:effectRef>
+          <a:fontRef idx="minor">
+            <a:schemeClr val="dk1"/>
+          </a:fontRef>
+        </p:style>
+        <p:txBody>
+          <a:bodyPr wrap="square">
+            <a:spAutoFit/>
+          </a:bodyPr>
+          <a:lstStyle/>
+          <a:p>
+            <a:pPr>
+              <a:buNone/>
+            </a:pPr>
+            <a:r>
+              <a:rPr lang="en-GB" sz="1600" b="1" dirty="0">
+                <a:solidFill>
+                  <a:srgbClr val="000000"/>
+                </a:solidFill>
+                <a:effectLst/>
+                <a:latin typeface="Cascadia Mono" panose="020B0609020000020004" pitchFamily="49" charset="0"/>
+              </a:rPr>
+              <a:t> </a:t>
+            </a:r>
+            <a:r>
+              <a:rPr lang="en-GB" sz="1600" b="1" dirty="0">
+                <a:solidFill>
+                  <a:srgbClr val="0000FF"/>
+                </a:solidFill>
+                <a:effectLst/>
+                <a:latin typeface="Cascadia Mono" panose="020B0609020000020004" pitchFamily="49" charset="0"/>
+              </a:rPr>
+              <a:t>static</a:t>
+            </a:r>
+            <a:r>
+              <a:rPr lang="en-GB" sz="1600" b="1" dirty="0">
+                <a:solidFill>
+                  <a:srgbClr val="000000"/>
+                </a:solidFill>
+                <a:effectLst/>
+                <a:latin typeface="Cascadia Mono" panose="020B0609020000020004" pitchFamily="49" charset="0"/>
+              </a:rPr>
+              <a:t> </a:t>
+            </a:r>
+            <a:r>
+              <a:rPr lang="en-GB" sz="1600" b="1" dirty="0">
+                <a:solidFill>
+                  <a:srgbClr val="0000FF"/>
+                </a:solidFill>
+                <a:effectLst/>
+                <a:latin typeface="Cascadia Mono" panose="020B0609020000020004" pitchFamily="49" charset="0"/>
+              </a:rPr>
+              <a:t>void</a:t>
+            </a:r>
+            <a:r>
+              <a:rPr lang="en-GB" sz="1600" b="1" dirty="0">
+                <a:solidFill>
+                  <a:srgbClr val="000000"/>
+                </a:solidFill>
+                <a:effectLst/>
+                <a:latin typeface="Cascadia Mono" panose="020B0609020000020004" pitchFamily="49" charset="0"/>
+              </a:rPr>
+              <a:t> </a:t>
+            </a:r>
+            <a:r>
+              <a:rPr lang="en-GB" sz="1600" b="1" dirty="0">
+                <a:solidFill>
+                  <a:srgbClr val="74531F"/>
+                </a:solidFill>
+                <a:effectLst/>
+                <a:latin typeface="Cascadia Mono" panose="020B0609020000020004" pitchFamily="49" charset="0"/>
+              </a:rPr>
+              <a:t>Main</a:t>
+            </a:r>
+            <a:r>
+              <a:rPr lang="en-GB" sz="1600" b="1" dirty="0">
+                <a:solidFill>
+                  <a:srgbClr val="000000"/>
+                </a:solidFill>
+                <a:effectLst/>
+                <a:latin typeface="Cascadia Mono" panose="020B0609020000020004" pitchFamily="49" charset="0"/>
+              </a:rPr>
+              <a:t>()</a:t>
+            </a:r>
+          </a:p>
+          <a:p>
+            <a:pPr>
+              <a:buNone/>
+            </a:pPr>
+            <a:r>
+              <a:rPr lang="en-GB" sz="1600" b="1" dirty="0">
+                <a:solidFill>
+                  <a:srgbClr val="000000"/>
+                </a:solidFill>
+                <a:effectLst/>
+                <a:latin typeface="Cascadia Mono" panose="020B0609020000020004" pitchFamily="49" charset="0"/>
+              </a:rPr>
+              <a:t> {</a:t>
+            </a:r>
+          </a:p>
+          <a:p>
+            <a:pPr>
+              <a:buNone/>
+            </a:pPr>
+            <a:endParaRPr lang="en-GB" sz="1600" b="1" dirty="0">
+              <a:solidFill>
+                <a:srgbClr val="000000"/>
+              </a:solidFill>
+              <a:effectLst/>
+              <a:latin typeface="Cascadia Mono" panose="020B0609020000020004" pitchFamily="49" charset="0"/>
+            </a:endParaRPr>
+          </a:p>
+          <a:p>
+            <a:pPr>
+              <a:lnSpc>
+                <a:spcPct val="150000"/>
+              </a:lnSpc>
+              <a:buNone/>
+            </a:pPr>
+            <a:r>
+              <a:rPr lang="en-GB" sz="1600" b="1" dirty="0">
+                <a:solidFill>
+                  <a:srgbClr val="000000"/>
+                </a:solidFill>
+                <a:effectLst/>
+                <a:latin typeface="Cascadia Mono" panose="020B0609020000020004" pitchFamily="49" charset="0"/>
+              </a:rPr>
+              <a:t>      </a:t>
+            </a:r>
+            <a:r>
+              <a:rPr lang="en-GB" sz="1600" b="1" dirty="0">
+                <a:solidFill>
+                  <a:srgbClr val="0000FF"/>
+                </a:solidFill>
+                <a:effectLst/>
+                <a:latin typeface="Cascadia Mono" panose="020B0609020000020004" pitchFamily="49" charset="0"/>
+              </a:rPr>
+              <a:t>int</a:t>
+            </a:r>
+            <a:r>
+              <a:rPr lang="en-GB" sz="1600" b="1" dirty="0">
+                <a:solidFill>
+                  <a:srgbClr val="000000"/>
+                </a:solidFill>
+                <a:effectLst/>
+                <a:latin typeface="Cascadia Mono" panose="020B0609020000020004" pitchFamily="49" charset="0"/>
+              </a:rPr>
+              <a:t>[] </a:t>
+            </a:r>
+            <a:r>
+              <a:rPr lang="en-GB" sz="1600" b="1" dirty="0">
+                <a:solidFill>
+                  <a:srgbClr val="1F377F"/>
+                </a:solidFill>
+                <a:effectLst/>
+                <a:latin typeface="Cascadia Mono" panose="020B0609020000020004" pitchFamily="49" charset="0"/>
+              </a:rPr>
+              <a:t>ages</a:t>
+            </a:r>
+            <a:r>
+              <a:rPr lang="en-GB" sz="1600" b="1" dirty="0">
+                <a:solidFill>
+                  <a:srgbClr val="000000"/>
+                </a:solidFill>
+                <a:effectLst/>
+                <a:latin typeface="Cascadia Mono" panose="020B0609020000020004" pitchFamily="49" charset="0"/>
+              </a:rPr>
+              <a:t> = { 21, 16, 18, 32, 46, 75, 10 };</a:t>
+            </a:r>
+          </a:p>
+          <a:p>
+            <a:pPr>
+              <a:lnSpc>
+                <a:spcPct val="150000"/>
+              </a:lnSpc>
+              <a:buNone/>
+            </a:pPr>
+            <a:r>
+              <a:rPr lang="en-GB" sz="1600" b="1" dirty="0">
+                <a:solidFill>
+                  <a:srgbClr val="000000"/>
+                </a:solidFill>
+                <a:effectLst/>
+                <a:latin typeface="Cascadia Mono" panose="020B0609020000020004" pitchFamily="49" charset="0"/>
+              </a:rPr>
+              <a:t>      ages = </a:t>
+            </a:r>
+            <a:r>
+              <a:rPr lang="en-GB" b="1" dirty="0" err="1">
+                <a:solidFill>
+                  <a:srgbClr val="74531F"/>
+                </a:solidFill>
+                <a:effectLst/>
+                <a:latin typeface="Cascadia Mono" panose="020B0609020000020004" pitchFamily="49" charset="0"/>
+              </a:rPr>
+              <a:t>filterNumbers</a:t>
+            </a:r>
+            <a:r>
+              <a:rPr lang="en-GB" b="1" dirty="0">
+                <a:solidFill>
+                  <a:srgbClr val="000000"/>
+                </a:solidFill>
+                <a:effectLst/>
+                <a:latin typeface="Cascadia Mono" panose="020B0609020000020004" pitchFamily="49" charset="0"/>
+              </a:rPr>
+              <a:t>(</a:t>
+            </a:r>
+            <a:r>
+              <a:rPr lang="en-GB" b="1" dirty="0">
+                <a:solidFill>
+                  <a:srgbClr val="1F377F"/>
+                </a:solidFill>
+                <a:effectLst/>
+                <a:latin typeface="Cascadia Mono" panose="020B0609020000020004" pitchFamily="49" charset="0"/>
+              </a:rPr>
+              <a:t>ages</a:t>
+            </a:r>
+            <a:r>
+              <a:rPr lang="en-GB" b="1" dirty="0">
+                <a:solidFill>
+                  <a:srgbClr val="000000"/>
+                </a:solidFill>
+                <a:effectLst/>
+                <a:latin typeface="Cascadia Mono" panose="020B0609020000020004" pitchFamily="49" charset="0"/>
+              </a:rPr>
+              <a:t>, 18);</a:t>
+            </a:r>
+          </a:p>
+          <a:p>
+            <a:pPr>
+              <a:buNone/>
+            </a:pPr>
+            <a:r>
+              <a:rPr lang="en-GB" sz="1600" b="1" dirty="0">
+                <a:solidFill>
+                  <a:srgbClr val="000000"/>
+                </a:solidFill>
+                <a:effectLst/>
+                <a:latin typeface="Cascadia Mono" panose="020B0609020000020004" pitchFamily="49" charset="0"/>
+              </a:rPr>
+              <a:t> }</a:t>
+            </a:r>
+          </a:p>
+          <a:p>
+            <a:pPr>
+              <a:buNone/>
+            </a:pPr>
+            <a:endParaRPr lang="en-GB" sz="1600" b="1" dirty="0">
+              <a:solidFill>
+                <a:srgbClr val="000000"/>
+              </a:solidFill>
+              <a:effectLst/>
+              <a:latin typeface="Cascadia Mono" panose="020B0609020000020004" pitchFamily="49" charset="0"/>
+            </a:endParaRPr>
+          </a:p>
+          <a:p>
+            <a:pPr>
+              <a:buNone/>
+            </a:pPr>
+            <a:r>
+              <a:rPr lang="en-GB" sz="1600" b="1" dirty="0">
+                <a:solidFill>
+                  <a:srgbClr val="000000"/>
+                </a:solidFill>
+                <a:effectLst/>
+                <a:latin typeface="Cascadia Mono" panose="020B0609020000020004" pitchFamily="49" charset="0"/>
+              </a:rPr>
+              <a:t> </a:t>
+            </a:r>
+            <a:r>
+              <a:rPr lang="en-GB" sz="1600" b="1" dirty="0">
+                <a:solidFill>
+                  <a:srgbClr val="0000FF"/>
+                </a:solidFill>
+                <a:effectLst/>
+                <a:latin typeface="Cascadia Mono" panose="020B0609020000020004" pitchFamily="49" charset="0"/>
+              </a:rPr>
+              <a:t>private</a:t>
+            </a:r>
+            <a:r>
+              <a:rPr lang="en-GB" sz="1600" b="1" dirty="0">
+                <a:solidFill>
+                  <a:srgbClr val="000000"/>
+                </a:solidFill>
+                <a:effectLst/>
+                <a:latin typeface="Cascadia Mono" panose="020B0609020000020004" pitchFamily="49" charset="0"/>
+              </a:rPr>
+              <a:t> </a:t>
+            </a:r>
+            <a:r>
+              <a:rPr lang="en-GB" sz="1600" b="1" dirty="0">
+                <a:solidFill>
+                  <a:srgbClr val="0000FF"/>
+                </a:solidFill>
+                <a:effectLst/>
+                <a:latin typeface="Cascadia Mono" panose="020B0609020000020004" pitchFamily="49" charset="0"/>
+              </a:rPr>
+              <a:t>static</a:t>
+            </a:r>
+            <a:r>
+              <a:rPr lang="en-GB" sz="1600" b="1" dirty="0">
+                <a:solidFill>
+                  <a:srgbClr val="000000"/>
+                </a:solidFill>
+                <a:effectLst/>
+                <a:latin typeface="Cascadia Mono" panose="020B0609020000020004" pitchFamily="49" charset="0"/>
+              </a:rPr>
+              <a:t> </a:t>
+            </a:r>
+            <a:r>
+              <a:rPr lang="en-GB" b="1" dirty="0">
+                <a:solidFill>
+                  <a:schemeClr val="tx1"/>
+                </a:solidFill>
+                <a:effectLst/>
+                <a:latin typeface="Cascadia Mono" panose="020B0609020000020004" pitchFamily="49" charset="0"/>
+              </a:rPr>
+              <a:t>int[] </a:t>
+            </a:r>
+            <a:r>
+              <a:rPr lang="en-GB" sz="1600" b="1" dirty="0" err="1">
+                <a:solidFill>
+                  <a:srgbClr val="74531F"/>
+                </a:solidFill>
+                <a:effectLst/>
+                <a:latin typeface="Cascadia Mono" panose="020B0609020000020004" pitchFamily="49" charset="0"/>
+              </a:rPr>
+              <a:t>filterNumbers</a:t>
+            </a:r>
+            <a:r>
+              <a:rPr lang="en-GB" sz="1600" b="1" dirty="0">
+                <a:solidFill>
+                  <a:srgbClr val="000000"/>
+                </a:solidFill>
+                <a:effectLst/>
+                <a:latin typeface="Cascadia Mono" panose="020B0609020000020004" pitchFamily="49" charset="0"/>
+              </a:rPr>
+              <a:t>(</a:t>
+            </a:r>
+            <a:r>
+              <a:rPr lang="en-GB" b="1" dirty="0">
+                <a:solidFill>
+                  <a:srgbClr val="0000FF"/>
+                </a:solidFill>
+                <a:effectLst/>
+                <a:latin typeface="Cascadia Mono" panose="020B0609020000020004" pitchFamily="49" charset="0"/>
+              </a:rPr>
+              <a:t>int</a:t>
+            </a:r>
+            <a:r>
+              <a:rPr lang="en-GB" b="1" dirty="0">
+                <a:solidFill>
+                  <a:srgbClr val="000000"/>
+                </a:solidFill>
+                <a:effectLst/>
+                <a:latin typeface="Cascadia Mono" panose="020B0609020000020004" pitchFamily="49" charset="0"/>
+              </a:rPr>
+              <a:t>[] </a:t>
+            </a:r>
+            <a:r>
+              <a:rPr lang="en-GB" b="1" dirty="0">
+                <a:solidFill>
+                  <a:srgbClr val="1F377F"/>
+                </a:solidFill>
+                <a:effectLst/>
+                <a:latin typeface="Cascadia Mono" panose="020B0609020000020004" pitchFamily="49" charset="0"/>
+              </a:rPr>
+              <a:t>numbers</a:t>
+            </a:r>
+            <a:r>
+              <a:rPr lang="en-GB" sz="1600" b="1" dirty="0">
+                <a:solidFill>
+                  <a:srgbClr val="000000"/>
+                </a:solidFill>
+                <a:effectLst/>
+                <a:latin typeface="Cascadia Mono" panose="020B0609020000020004" pitchFamily="49" charset="0"/>
+              </a:rPr>
+              <a:t>, </a:t>
+            </a:r>
+            <a:r>
+              <a:rPr lang="en-GB" sz="1600" b="1" dirty="0">
+                <a:solidFill>
+                  <a:srgbClr val="0000FF"/>
+                </a:solidFill>
+                <a:effectLst/>
+                <a:latin typeface="Cascadia Mono" panose="020B0609020000020004" pitchFamily="49" charset="0"/>
+              </a:rPr>
+              <a:t>int</a:t>
+            </a:r>
+            <a:r>
+              <a:rPr lang="en-GB" sz="1600" b="1" dirty="0">
+                <a:solidFill>
+                  <a:srgbClr val="000000"/>
+                </a:solidFill>
+                <a:effectLst/>
+                <a:latin typeface="Cascadia Mono" panose="020B0609020000020004" pitchFamily="49" charset="0"/>
+              </a:rPr>
+              <a:t> </a:t>
+            </a:r>
+            <a:r>
+              <a:rPr lang="en-GB" sz="1600" b="1" dirty="0">
+                <a:solidFill>
+                  <a:srgbClr val="1F377F"/>
+                </a:solidFill>
+                <a:effectLst/>
+                <a:latin typeface="Cascadia Mono" panose="020B0609020000020004" pitchFamily="49" charset="0"/>
+              </a:rPr>
+              <a:t>max</a:t>
+            </a:r>
+            <a:r>
+              <a:rPr lang="en-GB" sz="1600" b="1" dirty="0">
+                <a:solidFill>
+                  <a:srgbClr val="000000"/>
+                </a:solidFill>
+                <a:effectLst/>
+                <a:latin typeface="Cascadia Mono" panose="020B0609020000020004" pitchFamily="49" charset="0"/>
+              </a:rPr>
+              <a:t>)</a:t>
+            </a:r>
+          </a:p>
+          <a:p>
+            <a:pPr>
+              <a:buNone/>
+            </a:pPr>
+            <a:r>
+              <a:rPr lang="en-GB" sz="1600" b="1" dirty="0">
+                <a:solidFill>
+                  <a:srgbClr val="000000"/>
+                </a:solidFill>
+                <a:effectLst/>
+                <a:latin typeface="Cascadia Mono" panose="020B0609020000020004" pitchFamily="49" charset="0"/>
+              </a:rPr>
+              <a:t> {</a:t>
+            </a:r>
+          </a:p>
+          <a:p>
+            <a:pPr>
+              <a:buNone/>
+            </a:pPr>
+            <a:r>
+              <a:rPr lang="en-GB" sz="1600" b="1" dirty="0">
+                <a:solidFill>
+                  <a:srgbClr val="000000"/>
+                </a:solidFill>
+                <a:effectLst/>
+                <a:latin typeface="Cascadia Mono" panose="020B0609020000020004" pitchFamily="49" charset="0"/>
+              </a:rPr>
+              <a:t>        </a:t>
+            </a:r>
+            <a:r>
+              <a:rPr lang="en-GB" sz="1600" b="1" dirty="0">
+                <a:solidFill>
+                  <a:srgbClr val="8F08C4"/>
+                </a:solidFill>
+                <a:effectLst/>
+                <a:latin typeface="Cascadia Mono" panose="020B0609020000020004" pitchFamily="49" charset="0"/>
+              </a:rPr>
+              <a:t>// process and create an array </a:t>
+            </a:r>
+            <a:r>
+              <a:rPr lang="en-GB" sz="1600" b="1" dirty="0">
+                <a:solidFill>
+                  <a:schemeClr val="tx1"/>
+                </a:solidFill>
+                <a:effectLst/>
+                <a:latin typeface="Cascadia Mono" panose="020B0609020000020004" pitchFamily="49" charset="0"/>
+              </a:rPr>
+              <a:t>int[] x;</a:t>
+            </a:r>
+          </a:p>
+          <a:p>
+            <a:pPr>
+              <a:buNone/>
+            </a:pPr>
+            <a:r>
+              <a:rPr lang="en-GB" sz="1600" b="1" dirty="0">
+                <a:solidFill>
+                  <a:schemeClr val="tx1"/>
+                </a:solidFill>
+                <a:latin typeface="Cascadia Mono" panose="020B0609020000020004" pitchFamily="49" charset="0"/>
+              </a:rPr>
+              <a:t>	return x;</a:t>
+            </a:r>
+            <a:endParaRPr lang="en-GB" sz="1600" b="1" dirty="0">
+              <a:solidFill>
+                <a:schemeClr val="tx1"/>
+              </a:solidFill>
+              <a:effectLst/>
+              <a:latin typeface="Cascadia Mono" panose="020B0609020000020004" pitchFamily="49" charset="0"/>
+            </a:endParaRPr>
+          </a:p>
+          <a:p>
+            <a:pPr>
+              <a:buNone/>
+            </a:pPr>
+            <a:r>
+              <a:rPr lang="en-GB" sz="1600" b="1" dirty="0">
+                <a:solidFill>
+                  <a:srgbClr val="000000"/>
+                </a:solidFill>
+                <a:effectLst/>
+                <a:latin typeface="Cascadia Mono" panose="020B0609020000020004" pitchFamily="49" charset="0"/>
+              </a:rPr>
+              <a:t>}</a:t>
+            </a:r>
+            <a:endParaRPr lang="en-GB" sz="4000" b="1" dirty="0"/>
+          </a:p>
+        </p:txBody>
+      </p:sp>
+    </p:spTree>
+    <p:extLst>
+      <p:ext uri="{BB962C8B-B14F-4D97-AF65-F5344CB8AC3E}">
+        <p14:creationId xmlns:p14="http://schemas.microsoft.com/office/powerpoint/2010/main" val="971305584"/>
+      </p:ext>
+    </p:extLst>
+  </p:cSld>
+  <p:clrMapOvr>
+    <a:masterClrMapping/>
+  </p:clrMapOvr>
+</p:sld>
+</file>
+
+<file path=ppt/slides/slide26.xml><?xml version="1.0" encoding="utf-8"?>
+<p:sld xmlns:a="http://schemas.openxmlformats.org/drawingml/2006/main" xmlns:r="http://schemas.openxmlformats.org/officeDocument/2006/relationships" xmlns:p="http://schemas.openxmlformats.org/presentationml/2006/main">
+  <p:cSld>
+    <p:spTree>
+      <p:nvGrpSpPr>
         <p:cNvPr id="1" name=""/>
         <p:cNvGrpSpPr/>
         <p:nvPr/>
@@ -35945,6 +36630,12 @@
           <a:prstGeom prst="rect">
             <a:avLst/>
           </a:prstGeom>
+          <a:solidFill>
+            <a:schemeClr val="accent5">
+              <a:lumMod val="20000"/>
+              <a:lumOff val="80000"/>
+            </a:schemeClr>
+          </a:solidFill>
           <a:ln>
             <a:solidFill>
               <a:schemeClr val="bg1">
@@ -36594,7 +37285,7 @@
 </p:sld>
 </file>
 
-<file path=ppt/slides/slide26.xml><?xml version="1.0" encoding="utf-8"?>
+<file path=ppt/slides/slide27.xml><?xml version="1.0" encoding="utf-8"?>
 <p:sld xmlns:a="http://schemas.openxmlformats.org/drawingml/2006/main" xmlns:r="http://schemas.openxmlformats.org/officeDocument/2006/relationships" xmlns:p="http://schemas.openxmlformats.org/presentationml/2006/main">
   <p:cSld>
     <p:spTree>
@@ -41259,6 +41950,12 @@
           <a:prstGeom prst="rect">
             <a:avLst/>
           </a:prstGeom>
+          <a:solidFill>
+            <a:schemeClr val="accent5">
+              <a:lumMod val="20000"/>
+              <a:lumOff val="80000"/>
+            </a:schemeClr>
+          </a:solidFill>
           <a:ln>
             <a:solidFill>
               <a:schemeClr val="bg1">
@@ -42928,6 +43625,23 @@
 </file>
 
 <file path=customXml/item1.xml><?xml version="1.0" encoding="utf-8"?>
+<p:properties xmlns:p="http://schemas.microsoft.com/office/2006/metadata/properties" xmlns:xsi="http://www.w3.org/2001/XMLSchema-instance" xmlns:pc="http://schemas.microsoft.com/office/infopath/2007/PartnerControls">
+  <documentManagement>
+    <SequenceNumber xmlns="6794D9DE-4FDF-4DC0-8B2C-5438320C69D5" xsi:nil="true"/>
+    <IsBuildFile xmlns="6794D9DE-4FDF-4DC0-8B2C-5438320C69D5" xsi:nil="true"/>
+    <BookTypeField0 xmlns="6794D9DE-4FDF-4DC0-8B2C-5438320C69D5">
+      <Terms xmlns="http://schemas.microsoft.com/office/infopath/2007/PartnerControls">
+        <TermInfo xmlns="http://schemas.microsoft.com/office/infopath/2007/PartnerControls">
+          <TermName xmlns="http://schemas.microsoft.com/office/infopath/2007/PartnerControls">IK</TermName>
+          <TermId xmlns="http://schemas.microsoft.com/office/infopath/2007/PartnerControls">5abe6401-e87a-4499-80b4-3d21a1a6ebd7</TermId>
+        </TermInfo>
+      </Terms>
+    </BookTypeField0>
+  </documentManagement>
+</p:properties>
+</file>
+
+<file path=customXml/item2.xml><?xml version="1.0" encoding="utf-8"?>
 <ct:contentTypeSchema xmlns:ct="http://schemas.microsoft.com/office/2006/metadata/contentType" xmlns:ma="http://schemas.microsoft.com/office/2006/metadata/properties/metaAttributes" ct:_="" ma:_="" ma:contentTypeName="Courseware" ma:contentTypeID="0x010100F0967B7CEE8D417F966757887D9466FB00B3EF5B1D149FDF49B1880C030D548140" ma:contentTypeVersion="0" ma:contentTypeDescription="Base content type which represents courseware documents" ma:contentTypeScope="" ma:versionID="ab0d7ca79e0ea5a537b031f986da336c">
   <xsd:schema xmlns:xsd="http://www.w3.org/2001/XMLSchema" xmlns:xs="http://www.w3.org/2001/XMLSchema" xmlns:p="http://schemas.microsoft.com/office/2006/metadata/properties" xmlns:ns2="6794D9DE-4FDF-4DC0-8B2C-5438320C69D5" targetNamespace="http://schemas.microsoft.com/office/2006/metadata/properties" ma:root="true" ma:fieldsID="7ff8e7c62cc10108c036e94c947d8fb9" ns2:_="">
     <xsd:import namespace="6794D9DE-4FDF-4DC0-8B2C-5438320C69D5"/>
@@ -43067,23 +43781,6 @@
 </ct:contentTypeSchema>
 </file>
 
-<file path=customXml/item2.xml><?xml version="1.0" encoding="utf-8"?>
-<p:properties xmlns:p="http://schemas.microsoft.com/office/2006/metadata/properties" xmlns:xsi="http://www.w3.org/2001/XMLSchema-instance" xmlns:pc="http://schemas.microsoft.com/office/infopath/2007/PartnerControls">
-  <documentManagement>
-    <SequenceNumber xmlns="6794D9DE-4FDF-4DC0-8B2C-5438320C69D5" xsi:nil="true"/>
-    <IsBuildFile xmlns="6794D9DE-4FDF-4DC0-8B2C-5438320C69D5" xsi:nil="true"/>
-    <BookTypeField0 xmlns="6794D9DE-4FDF-4DC0-8B2C-5438320C69D5">
-      <Terms xmlns="http://schemas.microsoft.com/office/infopath/2007/PartnerControls">
-        <TermInfo xmlns="http://schemas.microsoft.com/office/infopath/2007/PartnerControls">
-          <TermName xmlns="http://schemas.microsoft.com/office/infopath/2007/PartnerControls">IK</TermName>
-          <TermId xmlns="http://schemas.microsoft.com/office/infopath/2007/PartnerControls">5abe6401-e87a-4499-80b4-3d21a1a6ebd7</TermId>
-        </TermInfo>
-      </Terms>
-    </BookTypeField0>
-  </documentManagement>
-</p:properties>
-</file>
-
 <file path=customXml/item3.xml><?xml version="1.0" encoding="utf-8"?>
 <?mso-contentType ?>
 <FormTemplates xmlns="http://schemas.microsoft.com/sharepoint/v3/contenttype/forms">
@@ -43094,6 +43791,22 @@
 </file>
 
 <file path=customXml/itemProps1.xml><?xml version="1.0" encoding="utf-8"?>
+<ds:datastoreItem xmlns:ds="http://schemas.openxmlformats.org/officeDocument/2006/customXml" ds:itemID="{9A8F143C-5F8F-4F12-A25E-E0CFB4EDDD8F}">
+  <ds:schemaRefs>
+    <ds:schemaRef ds:uri="http://purl.org/dc/elements/1.1/"/>
+    <ds:schemaRef ds:uri="http://purl.org/dc/terms/"/>
+    <ds:schemaRef ds:uri="http://purl.org/dc/dcmitype/"/>
+    <ds:schemaRef ds:uri="http://www.w3.org/XML/1998/namespace"/>
+    <ds:schemaRef ds:uri="http://schemas.microsoft.com/office/2006/documentManagement/types"/>
+    <ds:schemaRef ds:uri="6794D9DE-4FDF-4DC0-8B2C-5438320C69D5"/>
+    <ds:schemaRef ds:uri="http://schemas.microsoft.com/office/infopath/2007/PartnerControls"/>
+    <ds:schemaRef ds:uri="http://schemas.openxmlformats.org/package/2006/metadata/core-properties"/>
+    <ds:schemaRef ds:uri="http://schemas.microsoft.com/office/2006/metadata/properties"/>
+  </ds:schemaRefs>
+</ds:datastoreItem>
+</file>
+
+<file path=customXml/itemProps2.xml><?xml version="1.0" encoding="utf-8"?>
 <ds:datastoreItem xmlns:ds="http://schemas.openxmlformats.org/officeDocument/2006/customXml" ds:itemID="{F2A14162-CCCA-4690-8872-03DEB9832203}">
   <ds:schemaRefs>
     <ds:schemaRef ds:uri="http://schemas.microsoft.com/office/2006/metadata/contentType"/>
@@ -43111,22 +43824,6 @@
 </ds:datastoreItem>
 </file>
 
-<file path=customXml/itemProps2.xml><?xml version="1.0" encoding="utf-8"?>
-<ds:datastoreItem xmlns:ds="http://schemas.openxmlformats.org/officeDocument/2006/customXml" ds:itemID="{9A8F143C-5F8F-4F12-A25E-E0CFB4EDDD8F}">
-  <ds:schemaRefs>
-    <ds:schemaRef ds:uri="http://purl.org/dc/elements/1.1/"/>
-    <ds:schemaRef ds:uri="http://purl.org/dc/terms/"/>
-    <ds:schemaRef ds:uri="http://purl.org/dc/dcmitype/"/>
-    <ds:schemaRef ds:uri="http://www.w3.org/XML/1998/namespace"/>
-    <ds:schemaRef ds:uri="http://schemas.microsoft.com/office/2006/documentManagement/types"/>
-    <ds:schemaRef ds:uri="6794D9DE-4FDF-4DC0-8B2C-5438320C69D5"/>
-    <ds:schemaRef ds:uri="http://schemas.microsoft.com/office/infopath/2007/PartnerControls"/>
-    <ds:schemaRef ds:uri="http://schemas.openxmlformats.org/package/2006/metadata/core-properties"/>
-    <ds:schemaRef ds:uri="http://schemas.microsoft.com/office/2006/metadata/properties"/>
-  </ds:schemaRefs>
-</ds:datastoreItem>
-</file>
-
 <file path=customXml/itemProps3.xml><?xml version="1.0" encoding="utf-8"?>
 <ds:datastoreItem xmlns:ds="http://schemas.openxmlformats.org/officeDocument/2006/customXml" ds:itemID="{E72A4E4C-4430-4993-B430-D45066C7803B}">
   <ds:schemaRefs>
